--- a/docs/ui-ux-design/diagrams/observability-portal-exec-deck-roadmap-v3.pptx
+++ b/docs/ui-ux-design/diagrams/observability-portal-exec-deck-roadmap-v3.pptx
@@ -11,6 +11,7 @@
     <p:sldId id="259" r:id="rId10"/>
     <p:sldId id="260" r:id="rId11"/>
     <p:sldId id="261" r:id="rId12"/>
+    <p:sldId id="262" r:id="rId13"/>
   </p:sldIdLst>
   <p:sldSz cx="12191695" cy="6858000" type="screen4x3"/>
   <p:notesSz cx="6858000" cy="9144000"/>
@@ -18356,6 +18357,775 @@
                 <a:latin typeface="Segoe UI"/>
               </a:rPr>
               <a:t>6</a:t>
+            </a:r>
+          </a:p>
+        </p:txBody>
+      </p:sp>
+    </p:spTree>
+  </p:cSld>
+  <p:clrMapOvr>
+    <a:masterClrMapping/>
+  </p:clrMapOvr>
+</p:sld>
+</file>
+
+<file path=ppt/slides/slide7.xml><?xml version="1.0" encoding="utf-8"?>
+<p:sld xmlns:a="http://schemas.openxmlformats.org/drawingml/2006/main" xmlns:p="http://schemas.openxmlformats.org/presentationml/2006/main" xmlns:r="http://schemas.openxmlformats.org/officeDocument/2006/relationships">
+  <p:cSld>
+    <p:spTree>
+      <p:nvGrpSpPr>
+        <p:cNvPr id="1" name=""/>
+        <p:cNvGrpSpPr/>
+        <p:nvPr/>
+      </p:nvGrpSpPr>
+      <p:grpSpPr/>
+      <p:sp>
+        <p:nvSpPr>
+          <p:cNvPr id="2" name="Rectangle 1"/>
+          <p:cNvSpPr/>
+          <p:nvPr/>
+        </p:nvSpPr>
+        <p:spPr>
+          <a:xfrm>
+            <a:off x="548640" y="822960"/>
+            <a:ext cx="822960" cy="41148"/>
+          </a:xfrm>
+          <a:prstGeom prst="rect">
+            <a:avLst/>
+          </a:prstGeom>
+          <a:solidFill>
+            <a:srgbClr val="2E74B5"/>
+          </a:solidFill>
+          <a:ln>
+            <a:noFill/>
+          </a:ln>
+          <a:effectLst/>
+        </p:spPr>
+        <p:style>
+          <a:lnRef idx="1">
+            <a:schemeClr val="accent1"/>
+          </a:lnRef>
+          <a:fillRef idx="3">
+            <a:schemeClr val="accent1"/>
+          </a:fillRef>
+          <a:effectRef idx="2">
+            <a:schemeClr val="accent1"/>
+          </a:effectRef>
+          <a:fontRef idx="minor">
+            <a:schemeClr val="lt1"/>
+          </a:fontRef>
+        </p:style>
+        <p:txBody>
+          <a:bodyPr rtlCol="0" anchor="ctr"/>
+          <a:lstStyle/>
+          <a:p>
+            <a:pPr algn="ctr"/>
+          </a:p>
+        </p:txBody>
+      </p:sp>
+      <p:sp>
+        <p:nvSpPr>
+          <p:cNvPr id="3" name="TextBox 2"/>
+          <p:cNvSpPr txBox="1"/>
+          <p:nvPr/>
+        </p:nvSpPr>
+        <p:spPr>
+          <a:xfrm>
+            <a:off x="548640" y="1005840"/>
+            <a:ext cx="10789920" cy="365760"/>
+          </a:xfrm>
+          <a:prstGeom prst="rect">
+            <a:avLst/>
+          </a:prstGeom>
+          <a:noFill/>
+        </p:spPr>
+        <p:txBody>
+          <a:bodyPr wrap="square" anchor="t" lIns="0" rIns="0" tIns="0" bIns="0">
+            <a:spAutoFit/>
+          </a:bodyPr>
+          <a:lstStyle/>
+          <a:p>
+            <a:pPr algn="l">
+              <a:spcAft>
+                <a:spcPts val="400"/>
+              </a:spcAft>
+            </a:pPr>
+            <a:r>
+              <a:rPr sz="1200" b="1">
+                <a:solidFill>
+                  <a:srgbClr val="C9D2DD"/>
+                </a:solidFill>
+                <a:latin typeface="Segoe UI"/>
+              </a:rPr>
+              <a:t>Q&amp;A · BACKUP</a:t>
+            </a:r>
+          </a:p>
+        </p:txBody>
+      </p:sp>
+      <p:sp>
+        <p:nvSpPr>
+          <p:cNvPr id="4" name="TextBox 3"/>
+          <p:cNvSpPr txBox="1"/>
+          <p:nvPr/>
+        </p:nvSpPr>
+        <p:spPr>
+          <a:xfrm>
+            <a:off x="548640" y="1371600"/>
+            <a:ext cx="10789920" cy="640080"/>
+          </a:xfrm>
+          <a:prstGeom prst="rect">
+            <a:avLst/>
+          </a:prstGeom>
+          <a:noFill/>
+        </p:spPr>
+        <p:txBody>
+          <a:bodyPr wrap="square" anchor="t" lIns="0" rIns="0" tIns="0" bIns="0">
+            <a:spAutoFit/>
+          </a:bodyPr>
+          <a:lstStyle/>
+          <a:p>
+            <a:pPr algn="l">
+              <a:spcAft>
+                <a:spcPts val="400"/>
+              </a:spcAft>
+            </a:pPr>
+            <a:r>
+              <a:rPr sz="3000" b="1">
+                <a:solidFill>
+                  <a:srgbClr val="FFFFFF"/>
+                </a:solidFill>
+                <a:latin typeface="Segoe UI"/>
+              </a:rPr>
+              <a:t>The four questions we ask ourselves</a:t>
+            </a:r>
+          </a:p>
+        </p:txBody>
+      </p:sp>
+      <p:sp>
+        <p:nvSpPr>
+          <p:cNvPr id="5" name="TextBox 4"/>
+          <p:cNvSpPr txBox="1"/>
+          <p:nvPr/>
+        </p:nvSpPr>
+        <p:spPr>
+          <a:xfrm>
+            <a:off x="548640" y="2103120"/>
+            <a:ext cx="640080" cy="640080"/>
+          </a:xfrm>
+          <a:prstGeom prst="rect">
+            <a:avLst/>
+          </a:prstGeom>
+          <a:noFill/>
+        </p:spPr>
+        <p:txBody>
+          <a:bodyPr wrap="square" anchor="t" lIns="0" rIns="0" tIns="0" bIns="0">
+            <a:spAutoFit/>
+          </a:bodyPr>
+          <a:lstStyle/>
+          <a:p>
+            <a:pPr algn="l">
+              <a:spcAft>
+                <a:spcPts val="400"/>
+              </a:spcAft>
+            </a:pPr>
+            <a:r>
+              <a:rPr sz="2400" b="1">
+                <a:solidFill>
+                  <a:srgbClr val="2E74B5"/>
+                </a:solidFill>
+                <a:latin typeface="Segoe UI"/>
+              </a:rPr>
+              <a:t>1</a:t>
+            </a:r>
+          </a:p>
+        </p:txBody>
+      </p:sp>
+      <p:sp>
+        <p:nvSpPr>
+          <p:cNvPr id="6" name="TextBox 5"/>
+          <p:cNvSpPr txBox="1"/>
+          <p:nvPr/>
+        </p:nvSpPr>
+        <p:spPr>
+          <a:xfrm>
+            <a:off x="1371600" y="2103120"/>
+            <a:ext cx="10058400" cy="365760"/>
+          </a:xfrm>
+          <a:prstGeom prst="rect">
+            <a:avLst/>
+          </a:prstGeom>
+          <a:noFill/>
+        </p:spPr>
+        <p:txBody>
+          <a:bodyPr wrap="square" anchor="t" lIns="0" rIns="0" tIns="0" bIns="0">
+            <a:spAutoFit/>
+          </a:bodyPr>
+          <a:lstStyle/>
+          <a:p>
+            <a:pPr algn="l">
+              <a:spcAft>
+                <a:spcPts val="400"/>
+              </a:spcAft>
+            </a:pPr>
+            <a:r>
+              <a:rPr sz="1500" b="1">
+                <a:solidFill>
+                  <a:srgbClr val="FFFFFF"/>
+                </a:solidFill>
+                <a:latin typeface="Segoe UI"/>
+              </a:rPr>
+              <a:t>What has been done?</a:t>
+            </a:r>
+          </a:p>
+        </p:txBody>
+      </p:sp>
+      <p:sp>
+        <p:nvSpPr>
+          <p:cNvPr id="7" name="TextBox 6"/>
+          <p:cNvSpPr txBox="1"/>
+          <p:nvPr/>
+        </p:nvSpPr>
+        <p:spPr>
+          <a:xfrm>
+            <a:off x="1371600" y="2468879"/>
+            <a:ext cx="9692640" cy="585216"/>
+          </a:xfrm>
+          <a:prstGeom prst="rect">
+            <a:avLst/>
+          </a:prstGeom>
+          <a:noFill/>
+        </p:spPr>
+        <p:txBody>
+          <a:bodyPr wrap="square" anchor="t" lIns="0" rIns="0" tIns="0" bIns="0">
+            <a:spAutoFit/>
+          </a:bodyPr>
+          <a:lstStyle/>
+          <a:p>
+            <a:pPr algn="l">
+              <a:spcAft>
+                <a:spcPts val="400"/>
+              </a:spcAft>
+            </a:pPr>
+            <a:r>
+              <a:rPr sz="1050" b="0">
+                <a:solidFill>
+                  <a:srgbClr val="C9D2DD"/>
+                </a:solidFill>
+                <a:latin typeface="Segoe UI"/>
+              </a:rPr>
+              <a:t>The first slice — DX UIM alerting — runs end to end and is in hardening: guided request, PR approval, automated activation, notification, git record. The full 20-service catalogue is designed and demoable in one design language; architecture, data model, and delivery plan are written down.</a:t>
+            </a:r>
+          </a:p>
+        </p:txBody>
+      </p:sp>
+      <p:sp>
+        <p:nvSpPr>
+          <p:cNvPr id="8" name="TextBox 7"/>
+          <p:cNvSpPr txBox="1"/>
+          <p:nvPr/>
+        </p:nvSpPr>
+        <p:spPr>
+          <a:xfrm>
+            <a:off x="548640" y="3072384"/>
+            <a:ext cx="640080" cy="640080"/>
+          </a:xfrm>
+          <a:prstGeom prst="rect">
+            <a:avLst/>
+          </a:prstGeom>
+          <a:noFill/>
+        </p:spPr>
+        <p:txBody>
+          <a:bodyPr wrap="square" anchor="t" lIns="0" rIns="0" tIns="0" bIns="0">
+            <a:spAutoFit/>
+          </a:bodyPr>
+          <a:lstStyle/>
+          <a:p>
+            <a:pPr algn="l">
+              <a:spcAft>
+                <a:spcPts val="400"/>
+              </a:spcAft>
+            </a:pPr>
+            <a:r>
+              <a:rPr sz="2400" b="1">
+                <a:solidFill>
+                  <a:srgbClr val="2E74B5"/>
+                </a:solidFill>
+                <a:latin typeface="Segoe UI"/>
+              </a:rPr>
+              <a:t>2</a:t>
+            </a:r>
+          </a:p>
+        </p:txBody>
+      </p:sp>
+      <p:sp>
+        <p:nvSpPr>
+          <p:cNvPr id="9" name="TextBox 8"/>
+          <p:cNvSpPr txBox="1"/>
+          <p:nvPr/>
+        </p:nvSpPr>
+        <p:spPr>
+          <a:xfrm>
+            <a:off x="1371600" y="3072384"/>
+            <a:ext cx="10058400" cy="365760"/>
+          </a:xfrm>
+          <a:prstGeom prst="rect">
+            <a:avLst/>
+          </a:prstGeom>
+          <a:noFill/>
+        </p:spPr>
+        <p:txBody>
+          <a:bodyPr wrap="square" anchor="t" lIns="0" rIns="0" tIns="0" bIns="0">
+            <a:spAutoFit/>
+          </a:bodyPr>
+          <a:lstStyle/>
+          <a:p>
+            <a:pPr algn="l">
+              <a:spcAft>
+                <a:spcPts val="400"/>
+              </a:spcAft>
+            </a:pPr>
+            <a:r>
+              <a:rPr sz="1500" b="1">
+                <a:solidFill>
+                  <a:srgbClr val="FFFFFF"/>
+                </a:solidFill>
+                <a:latin typeface="Segoe UI"/>
+              </a:rPr>
+              <a:t>When is production — and what will it offer?</a:t>
+            </a:r>
+          </a:p>
+        </p:txBody>
+      </p:sp>
+      <p:sp>
+        <p:nvSpPr>
+          <p:cNvPr id="10" name="TextBox 9"/>
+          <p:cNvSpPr txBox="1"/>
+          <p:nvPr/>
+        </p:nvSpPr>
+        <p:spPr>
+          <a:xfrm>
+            <a:off x="1371600" y="3438144"/>
+            <a:ext cx="9692640" cy="585216"/>
+          </a:xfrm>
+          <a:prstGeom prst="rect">
+            <a:avLst/>
+          </a:prstGeom>
+          <a:noFill/>
+        </p:spPr>
+        <p:txBody>
+          <a:bodyPr wrap="square" anchor="t" lIns="0" rIns="0" tIns="0" bIns="0">
+            <a:spAutoFit/>
+          </a:bodyPr>
+          <a:lstStyle/>
+          <a:p>
+            <a:pPr algn="l">
+              <a:spcAft>
+                <a:spcPts val="400"/>
+              </a:spcAft>
+            </a:pPr>
+            <a:r>
+              <a:rPr sz="1050" b="0">
+                <a:solidFill>
+                  <a:srgbClr val="C9D2DD"/>
+                </a:solidFill>
+                <a:latin typeface="Segoe UI"/>
+              </a:rPr>
+              <a:t>Hardening completes 30 Sep 2026; the Foundation tranche goes live early Q4 2026 (remaining gates: TLS, PROD credentials, change approval). Day one: self-service Process, Log &amp; CDM monitoring for Open Systems plus asset registration — approved by PR, activated automatically, recorded in git.</a:t>
+            </a:r>
+          </a:p>
+        </p:txBody>
+      </p:sp>
+      <p:sp>
+        <p:nvSpPr>
+          <p:cNvPr id="11" name="TextBox 10"/>
+          <p:cNvSpPr txBox="1"/>
+          <p:nvPr/>
+        </p:nvSpPr>
+        <p:spPr>
+          <a:xfrm>
+            <a:off x="548640" y="4041648"/>
+            <a:ext cx="640080" cy="640080"/>
+          </a:xfrm>
+          <a:prstGeom prst="rect">
+            <a:avLst/>
+          </a:prstGeom>
+          <a:noFill/>
+        </p:spPr>
+        <p:txBody>
+          <a:bodyPr wrap="square" anchor="t" lIns="0" rIns="0" tIns="0" bIns="0">
+            <a:spAutoFit/>
+          </a:bodyPr>
+          <a:lstStyle/>
+          <a:p>
+            <a:pPr algn="l">
+              <a:spcAft>
+                <a:spcPts val="400"/>
+              </a:spcAft>
+            </a:pPr>
+            <a:r>
+              <a:rPr sz="2400" b="1">
+                <a:solidFill>
+                  <a:srgbClr val="2E74B5"/>
+                </a:solidFill>
+                <a:latin typeface="Segoe UI"/>
+              </a:rPr>
+              <a:t>3</a:t>
+            </a:r>
+          </a:p>
+        </p:txBody>
+      </p:sp>
+      <p:sp>
+        <p:nvSpPr>
+          <p:cNvPr id="12" name="TextBox 11"/>
+          <p:cNvSpPr txBox="1"/>
+          <p:nvPr/>
+        </p:nvSpPr>
+        <p:spPr>
+          <a:xfrm>
+            <a:off x="1371600" y="4041648"/>
+            <a:ext cx="10058400" cy="365760"/>
+          </a:xfrm>
+          <a:prstGeom prst="rect">
+            <a:avLst/>
+          </a:prstGeom>
+          <a:noFill/>
+        </p:spPr>
+        <p:txBody>
+          <a:bodyPr wrap="square" anchor="t" lIns="0" rIns="0" tIns="0" bIns="0">
+            <a:spAutoFit/>
+          </a:bodyPr>
+          <a:lstStyle/>
+          <a:p>
+            <a:pPr algn="l">
+              <a:spcAft>
+                <a:spcPts val="400"/>
+              </a:spcAft>
+            </a:pPr>
+            <a:r>
+              <a:rPr sz="1500" b="1">
+                <a:solidFill>
+                  <a:srgbClr val="FFFFFF"/>
+                </a:solidFill>
+                <a:latin typeface="Segoe UI"/>
+              </a:rPr>
+              <a:t>When does it wrap up?</a:t>
+            </a:r>
+          </a:p>
+        </p:txBody>
+      </p:sp>
+      <p:sp>
+        <p:nvSpPr>
+          <p:cNvPr id="13" name="TextBox 12"/>
+          <p:cNvSpPr txBox="1"/>
+          <p:nvPr/>
+        </p:nvSpPr>
+        <p:spPr>
+          <a:xfrm>
+            <a:off x="1371600" y="4407408"/>
+            <a:ext cx="9692640" cy="585216"/>
+          </a:xfrm>
+          <a:prstGeom prst="rect">
+            <a:avLst/>
+          </a:prstGeom>
+          <a:noFill/>
+        </p:spPr>
+        <p:txBody>
+          <a:bodyPr wrap="square" anchor="t" lIns="0" rIns="0" tIns="0" bIns="0">
+            <a:spAutoFit/>
+          </a:bodyPr>
+          <a:lstStyle/>
+          <a:p>
+            <a:pPr algn="l">
+              <a:spcAft>
+                <a:spcPts val="400"/>
+              </a:spcAft>
+            </a:pPr>
+            <a:r>
+              <a:rPr sz="1050" b="0">
+                <a:solidFill>
+                  <a:srgbClr val="C9D2DD"/>
+                </a:solidFill>
+                <a:latin typeface="Segoe UI"/>
+              </a:rPr>
+              <a:t>The service catalogue completes through 2027 — expansion in H1, visibility in Q3, assurance in Q4 — and the Brain lands in 2028. The programme wraps; the Portal continues as a product: a new service is a new wizard and a new translator on the same pattern, not a new project.</a:t>
+            </a:r>
+          </a:p>
+        </p:txBody>
+      </p:sp>
+      <p:sp>
+        <p:nvSpPr>
+          <p:cNvPr id="14" name="TextBox 13"/>
+          <p:cNvSpPr txBox="1"/>
+          <p:nvPr/>
+        </p:nvSpPr>
+        <p:spPr>
+          <a:xfrm>
+            <a:off x="548640" y="6053328"/>
+            <a:ext cx="10789920" cy="365760"/>
+          </a:xfrm>
+          <a:prstGeom prst="rect">
+            <a:avLst/>
+          </a:prstGeom>
+          <a:noFill/>
+        </p:spPr>
+        <p:txBody>
+          <a:bodyPr wrap="square" anchor="t" lIns="0" rIns="0" tIns="0" bIns="0">
+            <a:spAutoFit/>
+          </a:bodyPr>
+          <a:lstStyle/>
+          <a:p>
+            <a:pPr algn="l">
+              <a:spcAft>
+                <a:spcPts val="400"/>
+              </a:spcAft>
+            </a:pPr>
+            <a:r>
+              <a:rPr sz="1200" b="0" i="1">
+                <a:solidFill>
+                  <a:srgbClr val="C9D2DD"/>
+                </a:solidFill>
+                <a:latin typeface="Segoe UI"/>
+              </a:rPr>
+              <a:t>First we automate the work, then we prove it works — then the platform starts answering and proposing itself.</a:t>
+            </a:r>
+          </a:p>
+        </p:txBody>
+      </p:sp>
+      <p:sp>
+        <p:nvSpPr>
+          <p:cNvPr id="15" name="Rectangle 14"/>
+          <p:cNvSpPr/>
+          <p:nvPr/>
+        </p:nvSpPr>
+        <p:spPr>
+          <a:xfrm>
+            <a:off x="548640" y="6455664"/>
+            <a:ext cx="11091672" cy="10972"/>
+          </a:xfrm>
+          <a:prstGeom prst="rect">
+            <a:avLst/>
+          </a:prstGeom>
+          <a:solidFill>
+            <a:srgbClr val="3E4C63"/>
+          </a:solidFill>
+          <a:ln>
+            <a:noFill/>
+          </a:ln>
+          <a:effectLst/>
+        </p:spPr>
+        <p:style>
+          <a:lnRef idx="1">
+            <a:schemeClr val="accent1"/>
+          </a:lnRef>
+          <a:fillRef idx="3">
+            <a:schemeClr val="accent1"/>
+          </a:fillRef>
+          <a:effectRef idx="2">
+            <a:schemeClr val="accent1"/>
+          </a:effectRef>
+          <a:fontRef idx="minor">
+            <a:schemeClr val="lt1"/>
+          </a:fontRef>
+        </p:style>
+        <p:txBody>
+          <a:bodyPr rtlCol="0" anchor="ctr"/>
+          <a:lstStyle/>
+          <a:p>
+            <a:pPr algn="ctr"/>
+          </a:p>
+        </p:txBody>
+      </p:sp>
+      <p:sp>
+        <p:nvSpPr>
+          <p:cNvPr id="16" name="TextBox 15"/>
+          <p:cNvSpPr txBox="1"/>
+          <p:nvPr/>
+        </p:nvSpPr>
+        <p:spPr>
+          <a:xfrm>
+            <a:off x="548640" y="6510528"/>
+            <a:ext cx="8229600" cy="274320"/>
+          </a:xfrm>
+          <a:prstGeom prst="rect">
+            <a:avLst/>
+          </a:prstGeom>
+          <a:noFill/>
+        </p:spPr>
+        <p:txBody>
+          <a:bodyPr wrap="square" anchor="t" lIns="0" rIns="0" tIns="0" bIns="0">
+            <a:spAutoFit/>
+          </a:bodyPr>
+          <a:lstStyle/>
+          <a:p>
+            <a:pPr algn="l">
+              <a:spcAft>
+                <a:spcPts val="400"/>
+              </a:spcAft>
+            </a:pPr>
+            <a:r>
+              <a:rPr sz="850" b="0">
+                <a:solidFill>
+                  <a:srgbClr val="C9D2DD"/>
+                </a:solidFill>
+                <a:latin typeface="Segoe UI"/>
+              </a:rPr>
+              <a:t>Observability Portal — Executive Briefing</a:t>
+            </a:r>
+          </a:p>
+        </p:txBody>
+      </p:sp>
+      <p:sp>
+        <p:nvSpPr>
+          <p:cNvPr id="17" name="TextBox 16"/>
+          <p:cNvSpPr txBox="1"/>
+          <p:nvPr/>
+        </p:nvSpPr>
+        <p:spPr>
+          <a:xfrm>
+            <a:off x="10972800" y="6510528"/>
+            <a:ext cx="667512" cy="274320"/>
+          </a:xfrm>
+          <a:prstGeom prst="rect">
+            <a:avLst/>
+          </a:prstGeom>
+          <a:noFill/>
+        </p:spPr>
+        <p:txBody>
+          <a:bodyPr wrap="square" anchor="t" lIns="0" rIns="0" tIns="0" bIns="0">
+            <a:spAutoFit/>
+          </a:bodyPr>
+          <a:lstStyle/>
+          <a:p>
+            <a:pPr algn="r">
+              <a:spcAft>
+                <a:spcPts val="400"/>
+              </a:spcAft>
+            </a:pPr>
+            <a:r>
+              <a:rPr sz="850" b="0">
+                <a:solidFill>
+                  <a:srgbClr val="C9D2DD"/>
+                </a:solidFill>
+                <a:latin typeface="Segoe UI"/>
+              </a:rPr>
+              <a:t>7</a:t>
+            </a:r>
+          </a:p>
+        </p:txBody>
+      </p:sp>
+      <p:sp>
+        <p:nvSpPr>
+          <p:cNvPr id="900" name="TextBox 10 Q4"/>
+          <p:cNvSpPr txBox="1"/>
+          <p:nvPr/>
+        </p:nvSpPr>
+        <p:spPr>
+          <a:xfrm>
+            <a:off x="548640" y="5010912"/>
+            <a:ext cx="640080" cy="640080"/>
+          </a:xfrm>
+          <a:prstGeom prst="rect">
+            <a:avLst/>
+          </a:prstGeom>
+          <a:noFill/>
+        </p:spPr>
+        <p:txBody>
+          <a:bodyPr wrap="square" anchor="t" lIns="0" rIns="0" tIns="0" bIns="0">
+            <a:spAutoFit/>
+          </a:bodyPr>
+          <a:lstStyle/>
+          <a:p>
+            <a:pPr algn="l">
+              <a:spcAft>
+                <a:spcPts val="400"/>
+              </a:spcAft>
+            </a:pPr>
+            <a:r>
+              <a:rPr sz="2400" b="1">
+                <a:solidFill>
+                  <a:srgbClr val="2E74B5"/>
+                </a:solidFill>
+                <a:latin typeface="Segoe UI"/>
+              </a:rPr>
+              <a:t>4</a:t>
+            </a:r>
+          </a:p>
+        </p:txBody>
+      </p:sp>
+      <p:sp>
+        <p:nvSpPr>
+          <p:cNvPr id="901" name="TextBox 11 Q4"/>
+          <p:cNvSpPr txBox="1"/>
+          <p:nvPr/>
+        </p:nvSpPr>
+        <p:spPr>
+          <a:xfrm>
+            <a:off x="1371600" y="5010912"/>
+            <a:ext cx="10058400" cy="365760"/>
+          </a:xfrm>
+          <a:prstGeom prst="rect">
+            <a:avLst/>
+          </a:prstGeom>
+          <a:noFill/>
+        </p:spPr>
+        <p:txBody>
+          <a:bodyPr wrap="square" anchor="t" lIns="0" rIns="0" tIns="0" bIns="0">
+            <a:spAutoFit/>
+          </a:bodyPr>
+          <a:lstStyle/>
+          <a:p>
+            <a:pPr algn="l">
+              <a:spcAft>
+                <a:spcPts val="400"/>
+              </a:spcAft>
+            </a:pPr>
+            <a:r>
+              <a:rPr sz="1500" b="1">
+                <a:solidFill>
+                  <a:srgbClr val="FFFFFF"/>
+                </a:solidFill>
+                <a:latin typeface="Segoe UI"/>
+              </a:rPr>
+              <a:t>What comes toward the end?</a:t>
+            </a:r>
+          </a:p>
+        </p:txBody>
+      </p:sp>
+      <p:sp>
+        <p:nvSpPr>
+          <p:cNvPr id="902" name="TextBox 12 Q4"/>
+          <p:cNvSpPr txBox="1"/>
+          <p:nvPr/>
+        </p:nvSpPr>
+        <p:spPr>
+          <a:xfrm>
+            <a:off x="1371600" y="5376672"/>
+            <a:ext cx="9692640" cy="585216"/>
+          </a:xfrm>
+          <a:prstGeom prst="rect">
+            <a:avLst/>
+          </a:prstGeom>
+          <a:noFill/>
+        </p:spPr>
+        <p:txBody>
+          <a:bodyPr wrap="square" anchor="t" lIns="0" rIns="0" tIns="0" bIns="0">
+            <a:spAutoFit/>
+          </a:bodyPr>
+          <a:lstStyle/>
+          <a:p>
+            <a:pPr algn="l">
+              <a:spcAft>
+                <a:spcPts val="400"/>
+              </a:spcAft>
+            </a:pPr>
+            <a:r>
+              <a:rPr sz="1050" b="0">
+                <a:solidFill>
+                  <a:srgbClr val="C9D2DD"/>
+                </a:solidFill>
+                <a:latin typeface="Segoe UI"/>
+              </a:rPr>
+              <a:t>The features only a recorded estate makes possible: daily reconciliation Reports, the Observability Score with certification, Synthetic fire-drills, governed Suppression — then the Brain: grounded answers, PR summaries for approvers, AI-drafted changes under the same approval gate.</a:t>
             </a:r>
           </a:p>
         </p:txBody>
